--- a/2026_SMDM/00_agenda_SMDM_2026_oslo.pptx
+++ b/2026_SMDM/00_agenda_SMDM_2026_oslo.pptx
@@ -3598,673 +3598,1433 @@
           <a:chExt cx="0" cy="0"/>
         </a:xfrm>
       </p:grpSpPr>
-      <p:graphicFrame>
-        <p:nvGraphicFramePr>
-          <p:cNvPr id="4" name="Content Placeholder 3">
-            <a:extLst>
-              <a:ext uri="{FF2B5EF4-FFF2-40B4-BE49-F238E27FC236}">
-                <a16:creationId xmlns:a16="http://schemas.microsoft.com/office/drawing/2014/main" id="{672125A1-A8AB-CFA0-C54F-8A364765CC43}"/>
-              </a:ext>
-            </a:extLst>
-          </p:cNvPr>
-          <p:cNvGraphicFramePr>
-            <a:graphicFrameLocks noGrp="1"/>
-          </p:cNvGraphicFramePr>
-          <p:nvPr>
-            <p:ph idx="1"/>
-            <p:extLst>
-              <p:ext uri="{D42A27DB-BD31-4B8C-83A1-F6EECF244321}">
-                <p14:modId xmlns:p14="http://schemas.microsoft.com/office/powerpoint/2010/main" val="1239633294"/>
-              </p:ext>
-            </p:extLst>
-          </p:nvPr>
-        </p:nvGraphicFramePr>
-        <p:xfrm>
-          <a:off x="1208690" y="942340"/>
-          <a:ext cx="10720551" cy="4973320"/>
-        </p:xfrm>
-        <a:graphic>
-          <a:graphicData uri="http://schemas.openxmlformats.org/drawingml/2006/table">
-            <a:tbl>
-              <a:tblPr firstRow="1" bandRow="1">
-                <a:tableStyleId>{21E4AEA4-8DFA-4A89-87EB-49C32662AFE0}</a:tableStyleId>
-              </a:tblPr>
-              <a:tblGrid>
-                <a:gridCol w="1717110">
-                  <a:extLst>
-                    <a:ext uri="{9D8B030D-6E8A-4147-A177-3AD203B41FA5}">
-                      <a16:colId xmlns:a16="http://schemas.microsoft.com/office/drawing/2014/main" val="4182014441"/>
-                    </a:ext>
-                  </a:extLst>
-                </a:gridCol>
-                <a:gridCol w="5976462">
-                  <a:extLst>
-                    <a:ext uri="{9D8B030D-6E8A-4147-A177-3AD203B41FA5}">
-                      <a16:colId xmlns:a16="http://schemas.microsoft.com/office/drawing/2014/main" val="906180283"/>
-                    </a:ext>
-                  </a:extLst>
-                </a:gridCol>
-                <a:gridCol w="3026979">
-                  <a:extLst>
-                    <a:ext uri="{9D8B030D-6E8A-4147-A177-3AD203B41FA5}">
-                      <a16:colId xmlns:a16="http://schemas.microsoft.com/office/drawing/2014/main" val="2769721792"/>
-                    </a:ext>
-                  </a:extLst>
-                </a:gridCol>
-              </a:tblGrid>
-              <a:tr h="370840">
-                <a:tc>
-                  <a:txBody>
-                    <a:bodyPr/>
-                    <a:lstStyle/>
-                    <a:p>
-                      <a:r>
-                        <a:rPr lang="en-US" dirty="0"/>
-                        <a:t>Time</a:t>
-                      </a:r>
-                    </a:p>
-                  </a:txBody>
-                  <a:tcPr/>
-                </a:tc>
-                <a:tc>
-                  <a:txBody>
-                    <a:bodyPr/>
-                    <a:lstStyle/>
-                    <a:p>
-                      <a:r>
-                        <a:rPr lang="en-US" dirty="0"/>
-                        <a:t>Description</a:t>
-                      </a:r>
-                    </a:p>
-                  </a:txBody>
-                  <a:tcPr/>
-                </a:tc>
-                <a:tc>
-                  <a:txBody>
-                    <a:bodyPr/>
-                    <a:lstStyle/>
-                    <a:p>
-                      <a:r>
-                        <a:rPr lang="en-US" dirty="0"/>
-                        <a:t>Discussant</a:t>
-                      </a:r>
-                    </a:p>
-                  </a:txBody>
-                  <a:tcPr/>
-                </a:tc>
+      <mc:AlternateContent xmlns:mc="http://schemas.openxmlformats.org/markup-compatibility/2006">
+        <mc:Choice xmlns:a14="http://schemas.microsoft.com/office/drawing/2010/main" Requires="a14">
+          <p:graphicFrame>
+            <p:nvGraphicFramePr>
+              <p:cNvPr id="4" name="Content Placeholder 3">
                 <a:extLst>
-                  <a:ext uri="{0D108BD9-81ED-4DB2-BD59-A6C34878D82A}">
-                    <a16:rowId xmlns:a16="http://schemas.microsoft.com/office/drawing/2014/main" val="1700444250"/>
+                  <a:ext uri="{FF2B5EF4-FFF2-40B4-BE49-F238E27FC236}">
+                    <a16:creationId xmlns:a16="http://schemas.microsoft.com/office/drawing/2014/main" id="{672125A1-A8AB-CFA0-C54F-8A364765CC43}"/>
                   </a:ext>
                 </a:extLst>
-              </a:tr>
-              <a:tr h="370840">
-                <a:tc>
-                  <a:txBody>
-                    <a:bodyPr/>
-                    <a:lstStyle/>
-                    <a:p>
-                      <a:r>
-                        <a:rPr lang="en-US" dirty="0"/>
-                        <a:t>[15 min]</a:t>
-                      </a:r>
-                    </a:p>
-                  </a:txBody>
-                  <a:tcPr/>
-                </a:tc>
-                <a:tc>
-                  <a:txBody>
-                    <a:bodyPr/>
-                    <a:lstStyle/>
-                    <a:p>
-                      <a:r>
-                        <a:rPr lang="en-US" sz="1800" kern="1200" dirty="0">
-                          <a:solidFill>
-                            <a:schemeClr val="dk1"/>
-                          </a:solidFill>
-                          <a:effectLst/>
-                          <a:latin typeface="+mn-lt"/>
-                          <a:ea typeface="+mn-ea"/>
-                          <a:cs typeface="+mn-cs"/>
-                        </a:rPr>
-                        <a:t>(0) Introductions and administrivia </a:t>
-                      </a:r>
-                      <a:endParaRPr lang="en-US" dirty="0"/>
-                    </a:p>
-                  </a:txBody>
-                  <a:tcPr/>
-                </a:tc>
-                <a:tc>
-                  <a:txBody>
-                    <a:bodyPr/>
-                    <a:lstStyle/>
-                    <a:p>
-                      <a:r>
-                        <a:rPr lang="en-US" dirty="0" err="1"/>
-                        <a:t>Trikalinos</a:t>
-                      </a:r>
-                      <a:endParaRPr lang="en-US" dirty="0"/>
-                    </a:p>
-                  </a:txBody>
-                  <a:tcPr/>
-                </a:tc>
+              </p:cNvPr>
+              <p:cNvGraphicFramePr>
+                <a:graphicFrameLocks noGrp="1"/>
+              </p:cNvGraphicFramePr>
+              <p:nvPr>
+                <p:ph idx="1"/>
+                <p:extLst>
+                  <p:ext uri="{D42A27DB-BD31-4B8C-83A1-F6EECF244321}">
+                    <p14:modId xmlns:p14="http://schemas.microsoft.com/office/powerpoint/2010/main" val="1673659455"/>
+                  </p:ext>
+                </p:extLst>
+              </p:nvPr>
+            </p:nvGraphicFramePr>
+            <p:xfrm>
+              <a:off x="1208690" y="942340"/>
+              <a:ext cx="10720551" cy="4699000"/>
+            </p:xfrm>
+            <a:graphic>
+              <a:graphicData uri="http://schemas.openxmlformats.org/drawingml/2006/table">
+                <a:tbl>
+                  <a:tblPr firstRow="1" bandRow="1">
+                    <a:tableStyleId>{21E4AEA4-8DFA-4A89-87EB-49C32662AFE0}</a:tableStyleId>
+                  </a:tblPr>
+                  <a:tblGrid>
+                    <a:gridCol w="1717110">
+                      <a:extLst>
+                        <a:ext uri="{9D8B030D-6E8A-4147-A177-3AD203B41FA5}">
+                          <a16:colId xmlns:a16="http://schemas.microsoft.com/office/drawing/2014/main" val="4182014441"/>
+                        </a:ext>
+                      </a:extLst>
+                    </a:gridCol>
+                    <a:gridCol w="5976462">
+                      <a:extLst>
+                        <a:ext uri="{9D8B030D-6E8A-4147-A177-3AD203B41FA5}">
+                          <a16:colId xmlns:a16="http://schemas.microsoft.com/office/drawing/2014/main" val="906180283"/>
+                        </a:ext>
+                      </a:extLst>
+                    </a:gridCol>
+                    <a:gridCol w="3026979">
+                      <a:extLst>
+                        <a:ext uri="{9D8B030D-6E8A-4147-A177-3AD203B41FA5}">
+                          <a16:colId xmlns:a16="http://schemas.microsoft.com/office/drawing/2014/main" val="2769721792"/>
+                        </a:ext>
+                      </a:extLst>
+                    </a:gridCol>
+                  </a:tblGrid>
+                  <a:tr h="370840">
+                    <a:tc>
+                      <a:txBody>
+                        <a:bodyPr/>
+                        <a:lstStyle/>
+                        <a:p>
+                          <a:r>
+                            <a:rPr lang="en-US" dirty="0"/>
+                            <a:t>Time</a:t>
+                          </a:r>
+                        </a:p>
+                      </a:txBody>
+                      <a:tcPr/>
+                    </a:tc>
+                    <a:tc>
+                      <a:txBody>
+                        <a:bodyPr/>
+                        <a:lstStyle/>
+                        <a:p>
+                          <a:r>
+                            <a:rPr lang="en-US" dirty="0"/>
+                            <a:t>Description</a:t>
+                          </a:r>
+                        </a:p>
+                      </a:txBody>
+                      <a:tcPr/>
+                    </a:tc>
+                    <a:tc>
+                      <a:txBody>
+                        <a:bodyPr/>
+                        <a:lstStyle/>
+                        <a:p>
+                          <a:r>
+                            <a:rPr lang="en-US" dirty="0"/>
+                            <a:t>Discussant</a:t>
+                          </a:r>
+                        </a:p>
+                      </a:txBody>
+                      <a:tcPr/>
+                    </a:tc>
+                    <a:extLst>
+                      <a:ext uri="{0D108BD9-81ED-4DB2-BD59-A6C34878D82A}">
+                        <a16:rowId xmlns:a16="http://schemas.microsoft.com/office/drawing/2014/main" val="1700444250"/>
+                      </a:ext>
+                    </a:extLst>
+                  </a:tr>
+                  <a:tr h="370840">
+                    <a:tc>
+                      <a:txBody>
+                        <a:bodyPr/>
+                        <a:lstStyle/>
+                        <a:p>
+                          <a:r>
+                            <a:rPr lang="en-US" dirty="0"/>
+                            <a:t>[15 min]</a:t>
+                          </a:r>
+                        </a:p>
+                      </a:txBody>
+                      <a:tcPr/>
+                    </a:tc>
+                    <a:tc>
+                      <a:txBody>
+                        <a:bodyPr/>
+                        <a:lstStyle/>
+                        <a:p>
+                          <a:r>
+                            <a:rPr lang="en-US" sz="1800" kern="1200" dirty="0">
+                              <a:solidFill>
+                                <a:schemeClr val="dk1"/>
+                              </a:solidFill>
+                              <a:effectLst/>
+                              <a:latin typeface="+mn-lt"/>
+                              <a:ea typeface="+mn-ea"/>
+                              <a:cs typeface="+mn-cs"/>
+                            </a:rPr>
+                            <a:t>(0) Introductions and administrivia </a:t>
+                          </a:r>
+                          <a:endParaRPr lang="en-US" dirty="0"/>
+                        </a:p>
+                      </a:txBody>
+                      <a:tcPr/>
+                    </a:tc>
+                    <a:tc>
+                      <a:txBody>
+                        <a:bodyPr/>
+                        <a:lstStyle/>
+                        <a:p>
+                          <a:r>
+                            <a:rPr lang="en-US" dirty="0" err="1"/>
+                            <a:t>Trikalinos</a:t>
+                          </a:r>
+                          <a:endParaRPr lang="en-US" dirty="0"/>
+                        </a:p>
+                      </a:txBody>
+                      <a:tcPr/>
+                    </a:tc>
+                    <a:extLst>
+                      <a:ext uri="{0D108BD9-81ED-4DB2-BD59-A6C34878D82A}">
+                        <a16:rowId xmlns:a16="http://schemas.microsoft.com/office/drawing/2014/main" val="2490995723"/>
+                      </a:ext>
+                    </a:extLst>
+                  </a:tr>
+                  <a:tr h="370840">
+                    <a:tc>
+                      <a:txBody>
+                        <a:bodyPr/>
+                        <a:lstStyle/>
+                        <a:p>
+                          <a:r>
+                            <a:rPr lang="en-US" dirty="0"/>
+                            <a:t>[25 min]</a:t>
+                          </a:r>
+                        </a:p>
+                      </a:txBody>
+                      <a:tcPr/>
+                    </a:tc>
+                    <a:tc>
+                      <a:txBody>
+                        <a:bodyPr/>
+                        <a:lstStyle/>
+                        <a:p>
+                          <a:r>
+                            <a:rPr lang="en-US" sz="1800" kern="1200" dirty="0">
+                              <a:solidFill>
+                                <a:schemeClr val="dk1"/>
+                              </a:solidFill>
+                              <a:effectLst/>
+                              <a:latin typeface="+mn-lt"/>
+                              <a:ea typeface="+mn-ea"/>
+                              <a:cs typeface="+mn-cs"/>
+                            </a:rPr>
+                            <a:t>(1) DES as a composition of point processes</a:t>
+                          </a:r>
+                        </a:p>
+                      </a:txBody>
+                      <a:tcPr/>
+                    </a:tc>
+                    <a:tc>
+                      <a:txBody>
+                        <a:bodyPr/>
+                        <a:lstStyle/>
+                        <a:p>
+                          <a:r>
+                            <a:rPr lang="en-US" dirty="0" err="1"/>
+                            <a:t>Alarid</a:t>
+                          </a:r>
+                          <a:r>
+                            <a:rPr lang="en-US" dirty="0"/>
+                            <a:t>-Escudero</a:t>
+                          </a:r>
+                        </a:p>
+                      </a:txBody>
+                      <a:tcPr/>
+                    </a:tc>
+                    <a:extLst>
+                      <a:ext uri="{0D108BD9-81ED-4DB2-BD59-A6C34878D82A}">
+                        <a16:rowId xmlns:a16="http://schemas.microsoft.com/office/drawing/2014/main" val="2065491183"/>
+                      </a:ext>
+                    </a:extLst>
+                  </a:tr>
+                  <a:tr h="370840">
+                    <a:tc>
+                      <a:txBody>
+                        <a:bodyPr/>
+                        <a:lstStyle/>
+                        <a:p>
+                          <a:r>
+                            <a:rPr lang="en-US" dirty="0"/>
+                            <a:t>[30 min]</a:t>
+                          </a:r>
+                        </a:p>
+                      </a:txBody>
+                      <a:tcPr/>
+                    </a:tc>
+                    <a:tc>
+                      <a:txBody>
+                        <a:bodyPr/>
+                        <a:lstStyle/>
+                        <a:p>
+                          <a:pPr marL="0" marR="0" lvl="0" indent="0" algn="l" defTabSz="914400" rtl="0" eaLnBrk="1" fontAlgn="auto" latinLnBrk="0" hangingPunct="1">
+                            <a:lnSpc>
+                              <a:spcPct val="100000"/>
+                            </a:lnSpc>
+                            <a:spcBef>
+                              <a:spcPts val="0"/>
+                            </a:spcBef>
+                            <a:spcAft>
+                              <a:spcPts val="0"/>
+                            </a:spcAft>
+                            <a:buClrTx/>
+                            <a:buSzTx/>
+                            <a:buFontTx/>
+                            <a:buNone/>
+                            <a:tabLst/>
+                            <a:defRPr/>
+                          </a:pPr>
+                          <a:r>
+                            <a:rPr lang="en-US" sz="1800" kern="1200" dirty="0">
+                              <a:solidFill>
+                                <a:schemeClr val="dk1"/>
+                              </a:solidFill>
+                              <a:effectLst/>
+                              <a:latin typeface="+mn-lt"/>
+                              <a:ea typeface="+mn-ea"/>
+                              <a:cs typeface="+mn-cs"/>
+                            </a:rPr>
+                            <a:t>(2) NHPPPs – key properties</a:t>
+                          </a:r>
+                        </a:p>
+                      </a:txBody>
+                      <a:tcPr/>
+                    </a:tc>
+                    <a:tc>
+                      <a:txBody>
+                        <a:bodyPr/>
+                        <a:lstStyle/>
+                        <a:p>
+                          <a:r>
+                            <a:rPr lang="en-US" dirty="0" err="1"/>
+                            <a:t>Trikalinos</a:t>
+                          </a:r>
+                          <a:endParaRPr lang="en-US" dirty="0"/>
+                        </a:p>
+                      </a:txBody>
+                      <a:tcPr/>
+                    </a:tc>
+                    <a:extLst>
+                      <a:ext uri="{0D108BD9-81ED-4DB2-BD59-A6C34878D82A}">
+                        <a16:rowId xmlns:a16="http://schemas.microsoft.com/office/drawing/2014/main" val="2757944147"/>
+                      </a:ext>
+                    </a:extLst>
+                  </a:tr>
+                  <a:tr h="370840">
+                    <a:tc>
+                      <a:txBody>
+                        <a:bodyPr/>
+                        <a:lstStyle/>
+                        <a:p>
+                          <a:r>
+                            <a:rPr lang="en-US" dirty="0"/>
+                            <a:t>[30 min]</a:t>
+                          </a:r>
+                        </a:p>
+                      </a:txBody>
+                      <a:tcPr/>
+                    </a:tc>
+                    <a:tc>
+                      <a:txBody>
+                        <a:bodyPr/>
+                        <a:lstStyle/>
+                        <a:p>
+                          <a:r>
+                            <a:rPr lang="en-US" sz="1800" kern="1200" dirty="0">
+                              <a:solidFill>
+                                <a:schemeClr val="dk1"/>
+                              </a:solidFill>
+                              <a:effectLst/>
+                              <a:latin typeface="+mn-lt"/>
+                              <a:ea typeface="+mn-ea"/>
+                              <a:cs typeface="+mn-cs"/>
+                            </a:rPr>
+                            <a:t>(3) Sampling from NHPPPs</a:t>
+                          </a:r>
+                          <a:endParaRPr lang="en-US" dirty="0"/>
+                        </a:p>
+                      </a:txBody>
+                      <a:tcPr/>
+                    </a:tc>
+                    <a:tc>
+                      <a:txBody>
+                        <a:bodyPr/>
+                        <a:lstStyle/>
+                        <a:p>
+                          <a:pPr marL="0" marR="0" lvl="0" indent="0" algn="l" defTabSz="914400" rtl="0" eaLnBrk="1" fontAlgn="auto" latinLnBrk="0" hangingPunct="1">
+                            <a:lnSpc>
+                              <a:spcPct val="100000"/>
+                            </a:lnSpc>
+                            <a:spcBef>
+                              <a:spcPts val="0"/>
+                            </a:spcBef>
+                            <a:spcAft>
+                              <a:spcPts val="0"/>
+                            </a:spcAft>
+                            <a:buClrTx/>
+                            <a:buSzTx/>
+                            <a:buFontTx/>
+                            <a:buNone/>
+                            <a:tabLst/>
+                            <a:defRPr/>
+                          </a:pPr>
+                          <a:r>
+                            <a:rPr lang="en-US" dirty="0"/>
+                            <a:t>Trikalinos</a:t>
+                          </a:r>
+                        </a:p>
+                      </a:txBody>
+                      <a:tcPr/>
+                    </a:tc>
+                    <a:extLst>
+                      <a:ext uri="{0D108BD9-81ED-4DB2-BD59-A6C34878D82A}">
+                        <a16:rowId xmlns:a16="http://schemas.microsoft.com/office/drawing/2014/main" val="1442363784"/>
+                      </a:ext>
+                    </a:extLst>
+                  </a:tr>
+                  <a:tr h="370840">
+                    <a:tc>
+                      <a:txBody>
+                        <a:bodyPr/>
+                        <a:lstStyle/>
+                        <a:p>
+                          <a:r>
+                            <a:rPr lang="en-US" dirty="0"/>
+                            <a:t>[15 min]</a:t>
+                          </a:r>
+                        </a:p>
+                      </a:txBody>
+                      <a:tcPr/>
+                    </a:tc>
+                    <a:tc>
+                      <a:txBody>
+                        <a:bodyPr/>
+                        <a:lstStyle/>
+                        <a:p>
+                          <a:pPr marL="0" marR="0" lvl="0" indent="0" algn="l" defTabSz="914400" rtl="0" eaLnBrk="1" fontAlgn="auto" latinLnBrk="0" hangingPunct="1">
+                            <a:lnSpc>
+                              <a:spcPct val="100000"/>
+                            </a:lnSpc>
+                            <a:spcBef>
+                              <a:spcPts val="0"/>
+                            </a:spcBef>
+                            <a:spcAft>
+                              <a:spcPts val="0"/>
+                            </a:spcAft>
+                            <a:buClrTx/>
+                            <a:buSzTx/>
+                            <a:buFontTx/>
+                            <a:buNone/>
+                            <a:tabLst/>
+                            <a:defRPr/>
+                          </a:pPr>
+                          <a:r>
+                            <a:rPr lang="en-US" b="1" dirty="0"/>
+                            <a:t>Break</a:t>
+                          </a:r>
+                        </a:p>
+                      </a:txBody>
+                      <a:tcPr/>
+                    </a:tc>
+                    <a:tc>
+                      <a:txBody>
+                        <a:bodyPr/>
+                        <a:lstStyle/>
+                        <a:p>
+                          <a:endParaRPr lang="en-US" dirty="0"/>
+                        </a:p>
+                      </a:txBody>
+                      <a:tcPr/>
+                    </a:tc>
+                    <a:extLst>
+                      <a:ext uri="{0D108BD9-81ED-4DB2-BD59-A6C34878D82A}">
+                        <a16:rowId xmlns:a16="http://schemas.microsoft.com/office/drawing/2014/main" val="1269228105"/>
+                      </a:ext>
+                    </a:extLst>
+                  </a:tr>
+                  <a:tr h="370840">
+                    <a:tc>
+                      <a:txBody>
+                        <a:bodyPr/>
+                        <a:lstStyle/>
+                        <a:p>
+                          <a:r>
+                            <a:rPr lang="en-US" dirty="0"/>
+                            <a:t>[80 min]</a:t>
+                          </a:r>
+                        </a:p>
+                      </a:txBody>
+                      <a:tcPr/>
+                    </a:tc>
+                    <a:tc>
+                      <a:txBody>
+                        <a:bodyPr/>
+                        <a:lstStyle/>
+                        <a:p>
+                          <a:r>
+                            <a:rPr lang="en-US" sz="1800" kern="1200" dirty="0">
+                              <a:solidFill>
+                                <a:schemeClr val="dk1"/>
+                              </a:solidFill>
+                              <a:effectLst/>
+                              <a:latin typeface="+mn-lt"/>
+                              <a:ea typeface="+mn-ea"/>
+                              <a:cs typeface="+mn-cs"/>
+                            </a:rPr>
+                            <a:t>(4) Working with code</a:t>
+                          </a:r>
+                        </a:p>
+                        <a:p>
+                          <a:r>
+                            <a:rPr lang="en-US" sz="1800" kern="1200" dirty="0">
+                              <a:solidFill>
+                                <a:schemeClr val="dk1"/>
+                              </a:solidFill>
+                              <a:effectLst/>
+                              <a:latin typeface="+mn-lt"/>
+                              <a:ea typeface="+mn-ea"/>
+                              <a:cs typeface="+mn-cs"/>
+                            </a:rPr>
+                            <a:t>-- Base </a:t>
+                          </a:r>
+                          <a:r>
+                            <a:rPr lang="en-US" sz="1800" kern="1200" dirty="0">
+                              <a:solidFill>
+                                <a:schemeClr val="dk1"/>
+                              </a:solidFill>
+                              <a:effectLst/>
+                              <a:latin typeface="Courier New" panose="02070309020205020404" pitchFamily="49" charset="0"/>
+                              <a:ea typeface="+mn-ea"/>
+                              <a:cs typeface="Courier New" panose="02070309020205020404" pitchFamily="49" charset="0"/>
+                            </a:rPr>
+                            <a:t>R</a:t>
+                          </a:r>
+                          <a:r>
+                            <a:rPr lang="en-US" sz="1800" kern="1200" dirty="0">
+                              <a:solidFill>
+                                <a:schemeClr val="dk1"/>
+                              </a:solidFill>
+                              <a:effectLst/>
+                              <a:latin typeface="+mn-lt"/>
+                              <a:ea typeface="+mn-ea"/>
+                              <a:cs typeface="+mn-cs"/>
+                            </a:rPr>
+                            <a:t> vs </a:t>
+                          </a:r>
+                          <a:r>
+                            <a:rPr lang="en-US" sz="1800" kern="1200" dirty="0" err="1">
+                              <a:solidFill>
+                                <a:schemeClr val="dk1"/>
+                              </a:solidFill>
+                              <a:effectLst/>
+                              <a:latin typeface="Courier New" panose="02070309020205020404" pitchFamily="49" charset="0"/>
+                              <a:ea typeface="+mn-ea"/>
+                              <a:cs typeface="Courier New" panose="02070309020205020404" pitchFamily="49" charset="0"/>
+                            </a:rPr>
+                            <a:t>nhppp</a:t>
+                          </a:r>
+                          <a:r>
+                            <a:rPr lang="en-US" sz="1800" kern="1200" dirty="0">
+                              <a:solidFill>
+                                <a:schemeClr val="dk1"/>
+                              </a:solidFill>
+                              <a:effectLst/>
+                              <a:latin typeface="+mn-lt"/>
+                              <a:ea typeface="+mn-ea"/>
+                              <a:cs typeface="+mn-cs"/>
+                            </a:rPr>
+                            <a:t>:  Simulate first vs all events in </a:t>
+                          </a:r>
+                          <a14:m>
+                            <m:oMath xmlns:m="http://schemas.openxmlformats.org/officeDocument/2006/math">
+                              <m:r>
+                                <a:rPr lang="en-US" sz="1800" b="0" i="1" kern="1200" smtClean="0">
+                                  <a:solidFill>
+                                    <a:schemeClr val="dk1"/>
+                                  </a:solidFill>
+                                  <a:effectLst/>
+                                  <a:latin typeface="Cambria Math" panose="02040503050406030204" pitchFamily="18" charset="0"/>
+                                  <a:ea typeface="+mn-ea"/>
+                                  <a:cs typeface="+mn-cs"/>
+                                </a:rPr>
+                                <m:t>(</m:t>
+                              </m:r>
+                              <m:r>
+                                <m:rPr>
+                                  <m:sty m:val="p"/>
+                                </m:rPr>
+                                <a:rPr lang="en-US" sz="1800" b="0" i="1" kern="1200" smtClean="0">
+                                  <a:solidFill>
+                                    <a:schemeClr val="dk1"/>
+                                  </a:solidFill>
+                                  <a:effectLst/>
+                                  <a:latin typeface="Cambria Math" panose="02040503050406030204" pitchFamily="18" charset="0"/>
+                                  <a:ea typeface="+mn-ea"/>
+                                  <a:cs typeface="+mn-cs"/>
+                                </a:rPr>
+                                <m:t>a</m:t>
+                              </m:r>
+                              <m:r>
+                                <a:rPr lang="en-US" sz="1800" b="0" i="1" kern="1200" smtClean="0">
+                                  <a:solidFill>
+                                    <a:schemeClr val="dk1"/>
+                                  </a:solidFill>
+                                  <a:effectLst/>
+                                  <a:latin typeface="Cambria Math" panose="02040503050406030204" pitchFamily="18" charset="0"/>
+                                  <a:ea typeface="+mn-ea"/>
+                                  <a:cs typeface="+mn-cs"/>
+                                </a:rPr>
+                                <m:t>,</m:t>
+                              </m:r>
+                              <m:r>
+                                <m:rPr>
+                                  <m:sty m:val="p"/>
+                                </m:rPr>
+                                <a:rPr lang="en-US" sz="1800" b="0" i="1" kern="1200" smtClean="0">
+                                  <a:solidFill>
+                                    <a:schemeClr val="dk1"/>
+                                  </a:solidFill>
+                                  <a:effectLst/>
+                                  <a:latin typeface="Cambria Math" panose="02040503050406030204" pitchFamily="18" charset="0"/>
+                                  <a:ea typeface="+mn-ea"/>
+                                  <a:cs typeface="+mn-cs"/>
+                                </a:rPr>
+                                <m:t>b</m:t>
+                              </m:r>
+                              <m:r>
+                                <a:rPr lang="en-US" sz="1800" b="0" i="1" kern="1200" smtClean="0">
+                                  <a:solidFill>
+                                    <a:schemeClr val="dk1"/>
+                                  </a:solidFill>
+                                  <a:effectLst/>
+                                  <a:latin typeface="Cambria Math" panose="02040503050406030204" pitchFamily="18" charset="0"/>
+                                  <a:ea typeface="+mn-ea"/>
+                                  <a:cs typeface="+mn-cs"/>
+                                </a:rPr>
+                                <m:t>]</m:t>
+                              </m:r>
+                            </m:oMath>
+                          </a14:m>
+                          <a:endParaRPr lang="en-US" sz="1800" kern="1200" dirty="0">
+                            <a:solidFill>
+                              <a:schemeClr val="dk1"/>
+                            </a:solidFill>
+                            <a:effectLst/>
+                            <a:latin typeface="+mn-lt"/>
+                            <a:ea typeface="+mn-ea"/>
+                            <a:cs typeface="+mn-cs"/>
+                          </a:endParaRPr>
+                        </a:p>
+                        <a:p>
+                          <a:r>
+                            <a:rPr lang="en-US" sz="1800" kern="1200" dirty="0">
+                              <a:solidFill>
+                                <a:schemeClr val="dk1"/>
+                              </a:solidFill>
+                              <a:effectLst/>
+                              <a:latin typeface="+mn-lt"/>
+                              <a:ea typeface="+mn-ea"/>
+                              <a:cs typeface="+mn-cs"/>
+                            </a:rPr>
+                            <a:t>-- Packaging a simple cancer DES </a:t>
+                          </a:r>
+                        </a:p>
+                        <a:p>
+                          <a:r>
+                            <a:rPr lang="en-US" sz="1800" kern="1200" dirty="0">
+                              <a:solidFill>
+                                <a:schemeClr val="dk1"/>
+                              </a:solidFill>
+                              <a:effectLst/>
+                              <a:latin typeface="+mn-lt"/>
+                              <a:ea typeface="+mn-ea"/>
+                              <a:cs typeface="+mn-cs"/>
+                            </a:rPr>
+                            <a:t>-- The vectorized case </a:t>
+                          </a:r>
+                        </a:p>
+                      </a:txBody>
+                      <a:tcPr/>
+                    </a:tc>
+                    <a:tc>
+                      <a:txBody>
+                        <a:bodyPr/>
+                        <a:lstStyle/>
+                        <a:p>
+                          <a:r>
+                            <a:rPr lang="en-US" dirty="0"/>
+                            <a:t>[All]</a:t>
+                          </a:r>
+                        </a:p>
+                        <a:p>
+                          <a:r>
+                            <a:rPr lang="en-US" dirty="0"/>
+                            <a:t>Trikalinos</a:t>
+                          </a:r>
+                        </a:p>
+                        <a:p>
+                          <a:r>
+                            <a:rPr lang="en-US" dirty="0"/>
+                            <a:t>Sereda</a:t>
+                          </a:r>
+                        </a:p>
+                        <a:p>
+                          <a:pPr marL="0" marR="0" lvl="0" indent="0" algn="l" defTabSz="914400" rtl="0" eaLnBrk="1" fontAlgn="auto" latinLnBrk="0" hangingPunct="1">
+                            <a:lnSpc>
+                              <a:spcPct val="100000"/>
+                            </a:lnSpc>
+                            <a:spcBef>
+                              <a:spcPts val="0"/>
+                            </a:spcBef>
+                            <a:spcAft>
+                              <a:spcPts val="0"/>
+                            </a:spcAft>
+                            <a:buClrTx/>
+                            <a:buSzTx/>
+                            <a:buFontTx/>
+                            <a:buNone/>
+                            <a:tabLst/>
+                            <a:defRPr/>
+                          </a:pPr>
+                          <a:r>
+                            <a:rPr lang="en-US" dirty="0"/>
+                            <a:t>Sereda</a:t>
+                          </a:r>
+                        </a:p>
+                      </a:txBody>
+                      <a:tcPr/>
+                    </a:tc>
+                    <a:extLst>
+                      <a:ext uri="{0D108BD9-81ED-4DB2-BD59-A6C34878D82A}">
+                        <a16:rowId xmlns:a16="http://schemas.microsoft.com/office/drawing/2014/main" val="1448491104"/>
+                      </a:ext>
+                    </a:extLst>
+                  </a:tr>
+                  <a:tr h="370840">
+                    <a:tc>
+                      <a:txBody>
+                        <a:bodyPr/>
+                        <a:lstStyle/>
+                        <a:p>
+                          <a:r>
+                            <a:rPr lang="en-US" dirty="0"/>
+                            <a:t>[5 min]</a:t>
+                          </a:r>
+                        </a:p>
+                      </a:txBody>
+                      <a:tcPr/>
+                    </a:tc>
+                    <a:tc>
+                      <a:txBody>
+                        <a:bodyPr/>
+                        <a:lstStyle/>
+                        <a:p>
+                          <a:pPr marL="0" marR="0" lvl="0" indent="0" algn="l" defTabSz="914400" rtl="0" eaLnBrk="1" fontAlgn="auto" latinLnBrk="0" hangingPunct="1">
+                            <a:lnSpc>
+                              <a:spcPct val="100000"/>
+                            </a:lnSpc>
+                            <a:spcBef>
+                              <a:spcPts val="0"/>
+                            </a:spcBef>
+                            <a:spcAft>
+                              <a:spcPts val="0"/>
+                            </a:spcAft>
+                            <a:buClrTx/>
+                            <a:buSzTx/>
+                            <a:buFontTx/>
+                            <a:buNone/>
+                            <a:tabLst/>
+                            <a:defRPr/>
+                          </a:pPr>
+                          <a:r>
+                            <a:rPr lang="en-US" sz="1800" kern="1200" dirty="0">
+                              <a:solidFill>
+                                <a:schemeClr val="dk1"/>
+                              </a:solidFill>
+                              <a:effectLst/>
+                              <a:latin typeface="+mn-lt"/>
+                              <a:ea typeface="+mn-ea"/>
+                              <a:cs typeface="+mn-cs"/>
+                            </a:rPr>
+                            <a:t>(5) Advanced Topic Teaser on self-excitatory processes: point processes that are not NHPPPs and when you may need them</a:t>
+                          </a:r>
+                        </a:p>
+                      </a:txBody>
+                      <a:tcPr/>
+                    </a:tc>
+                    <a:tc>
+                      <a:txBody>
+                        <a:bodyPr/>
+                        <a:lstStyle/>
+                        <a:p>
+                          <a:r>
+                            <a:rPr lang="en-US" dirty="0"/>
+                            <a:t>Trikalinos</a:t>
+                          </a:r>
+                        </a:p>
+                      </a:txBody>
+                      <a:tcPr/>
+                    </a:tc>
+                    <a:extLst>
+                      <a:ext uri="{0D108BD9-81ED-4DB2-BD59-A6C34878D82A}">
+                        <a16:rowId xmlns:a16="http://schemas.microsoft.com/office/drawing/2014/main" val="3766472740"/>
+                      </a:ext>
+                    </a:extLst>
+                  </a:tr>
+                  <a:tr h="370840">
+                    <a:tc>
+                      <a:txBody>
+                        <a:bodyPr/>
+                        <a:lstStyle/>
+                        <a:p>
+                          <a:r>
+                            <a:rPr lang="en-US" dirty="0"/>
+                            <a:t>[15 min]</a:t>
+                          </a:r>
+                        </a:p>
+                      </a:txBody>
+                      <a:tcPr/>
+                    </a:tc>
+                    <a:tc>
+                      <a:txBody>
+                        <a:bodyPr/>
+                        <a:lstStyle/>
+                        <a:p>
+                          <a:r>
+                            <a:rPr lang="en-US" dirty="0"/>
+                            <a:t>General Q &amp; A</a:t>
+                          </a:r>
+                        </a:p>
+                      </a:txBody>
+                      <a:tcPr/>
+                    </a:tc>
+                    <a:tc>
+                      <a:txBody>
+                        <a:bodyPr/>
+                        <a:lstStyle/>
+                        <a:p>
+                          <a:r>
+                            <a:rPr lang="en-US" dirty="0"/>
+                            <a:t>All</a:t>
+                          </a:r>
+                        </a:p>
+                      </a:txBody>
+                      <a:tcPr/>
+                    </a:tc>
+                    <a:extLst>
+                      <a:ext uri="{0D108BD9-81ED-4DB2-BD59-A6C34878D82A}">
+                        <a16:rowId xmlns:a16="http://schemas.microsoft.com/office/drawing/2014/main" val="3034331301"/>
+                      </a:ext>
+                    </a:extLst>
+                  </a:tr>
+                </a:tbl>
+              </a:graphicData>
+            </a:graphic>
+          </p:graphicFrame>
+        </mc:Choice>
+        <mc:Fallback>
+          <p:graphicFrame>
+            <p:nvGraphicFramePr>
+              <p:cNvPr id="4" name="Content Placeholder 3">
                 <a:extLst>
-                  <a:ext uri="{0D108BD9-81ED-4DB2-BD59-A6C34878D82A}">
-                    <a16:rowId xmlns:a16="http://schemas.microsoft.com/office/drawing/2014/main" val="2490995723"/>
+                  <a:ext uri="{FF2B5EF4-FFF2-40B4-BE49-F238E27FC236}">
+                    <a16:creationId xmlns:a16="http://schemas.microsoft.com/office/drawing/2014/main" id="{672125A1-A8AB-CFA0-C54F-8A364765CC43}"/>
                   </a:ext>
                 </a:extLst>
-              </a:tr>
-              <a:tr h="370840">
-                <a:tc>
-                  <a:txBody>
-                    <a:bodyPr/>
-                    <a:lstStyle/>
-                    <a:p>
-                      <a:r>
-                        <a:rPr lang="en-US" dirty="0"/>
-                        <a:t>[25 min]</a:t>
-                      </a:r>
-                    </a:p>
-                  </a:txBody>
-                  <a:tcPr/>
-                </a:tc>
-                <a:tc>
-                  <a:txBody>
-                    <a:bodyPr/>
-                    <a:lstStyle/>
-                    <a:p>
-                      <a:r>
-                        <a:rPr lang="en-US" sz="1800" kern="1200" dirty="0">
-                          <a:solidFill>
-                            <a:schemeClr val="dk1"/>
-                          </a:solidFill>
-                          <a:effectLst/>
-                          <a:latin typeface="+mn-lt"/>
-                          <a:ea typeface="+mn-ea"/>
-                          <a:cs typeface="+mn-cs"/>
-                        </a:rPr>
-                        <a:t>(1) DES as a composition of point processes</a:t>
-                      </a:r>
-                    </a:p>
-                  </a:txBody>
-                  <a:tcPr/>
-                </a:tc>
-                <a:tc>
-                  <a:txBody>
-                    <a:bodyPr/>
-                    <a:lstStyle/>
-                    <a:p>
-                      <a:r>
-                        <a:rPr lang="en-US" dirty="0" err="1"/>
-                        <a:t>Alarid</a:t>
-                      </a:r>
-                      <a:r>
-                        <a:rPr lang="en-US" dirty="0"/>
-                        <a:t>-Escudero</a:t>
-                      </a:r>
-                    </a:p>
-                  </a:txBody>
-                  <a:tcPr/>
-                </a:tc>
-                <a:extLst>
-                  <a:ext uri="{0D108BD9-81ED-4DB2-BD59-A6C34878D82A}">
-                    <a16:rowId xmlns:a16="http://schemas.microsoft.com/office/drawing/2014/main" val="2065491183"/>
-                  </a:ext>
-                </a:extLst>
-              </a:tr>
-              <a:tr h="370840">
-                <a:tc>
-                  <a:txBody>
-                    <a:bodyPr/>
-                    <a:lstStyle/>
-                    <a:p>
-                      <a:r>
-                        <a:rPr lang="en-US" dirty="0"/>
-                        <a:t>[30 min]</a:t>
-                      </a:r>
-                    </a:p>
-                  </a:txBody>
-                  <a:tcPr/>
-                </a:tc>
-                <a:tc>
-                  <a:txBody>
-                    <a:bodyPr/>
-                    <a:lstStyle/>
-                    <a:p>
-                      <a:pPr marL="0" marR="0" lvl="0" indent="0" algn="l" defTabSz="914400" rtl="0" eaLnBrk="1" fontAlgn="auto" latinLnBrk="0" hangingPunct="1">
-                        <a:lnSpc>
-                          <a:spcPct val="100000"/>
-                        </a:lnSpc>
-                        <a:spcBef>
-                          <a:spcPts val="0"/>
-                        </a:spcBef>
-                        <a:spcAft>
-                          <a:spcPts val="0"/>
-                        </a:spcAft>
-                        <a:buClrTx/>
-                        <a:buSzTx/>
-                        <a:buFontTx/>
-                        <a:buNone/>
-                        <a:tabLst/>
-                        <a:defRPr/>
-                      </a:pPr>
-                      <a:r>
-                        <a:rPr lang="en-US" sz="1800" kern="1200" dirty="0">
-                          <a:solidFill>
-                            <a:schemeClr val="dk1"/>
-                          </a:solidFill>
-                          <a:effectLst/>
-                          <a:latin typeface="+mn-lt"/>
-                          <a:ea typeface="+mn-ea"/>
-                          <a:cs typeface="+mn-cs"/>
-                        </a:rPr>
-                        <a:t>(2) NHPPPs – key properties</a:t>
-                      </a:r>
-                    </a:p>
-                  </a:txBody>
-                  <a:tcPr/>
-                </a:tc>
-                <a:tc>
-                  <a:txBody>
-                    <a:bodyPr/>
-                    <a:lstStyle/>
-                    <a:p>
-                      <a:r>
-                        <a:rPr lang="en-US" dirty="0" err="1"/>
-                        <a:t>Trikalinos</a:t>
-                      </a:r>
-                      <a:endParaRPr lang="en-US" dirty="0"/>
-                    </a:p>
-                  </a:txBody>
-                  <a:tcPr/>
-                </a:tc>
-                <a:extLst>
-                  <a:ext uri="{0D108BD9-81ED-4DB2-BD59-A6C34878D82A}">
-                    <a16:rowId xmlns:a16="http://schemas.microsoft.com/office/drawing/2014/main" val="2757944147"/>
-                  </a:ext>
-                </a:extLst>
-              </a:tr>
-              <a:tr h="370840">
-                <a:tc>
-                  <a:txBody>
-                    <a:bodyPr/>
-                    <a:lstStyle/>
-                    <a:p>
-                      <a:r>
-                        <a:rPr lang="en-US" dirty="0"/>
-                        <a:t>[30 min]</a:t>
-                      </a:r>
-                    </a:p>
-                  </a:txBody>
-                  <a:tcPr/>
-                </a:tc>
-                <a:tc>
-                  <a:txBody>
-                    <a:bodyPr/>
-                    <a:lstStyle/>
-                    <a:p>
-                      <a:r>
-                        <a:rPr lang="en-US" sz="1800" kern="1200" dirty="0">
-                          <a:solidFill>
-                            <a:schemeClr val="dk1"/>
-                          </a:solidFill>
-                          <a:effectLst/>
-                          <a:latin typeface="+mn-lt"/>
-                          <a:ea typeface="+mn-ea"/>
-                          <a:cs typeface="+mn-cs"/>
-                        </a:rPr>
-                        <a:t>(3) Sampling from NHPPPs</a:t>
-                      </a:r>
-                      <a:endParaRPr lang="en-US" dirty="0"/>
-                    </a:p>
-                  </a:txBody>
-                  <a:tcPr/>
-                </a:tc>
-                <a:tc>
-                  <a:txBody>
-                    <a:bodyPr/>
-                    <a:lstStyle/>
-                    <a:p>
-                      <a:r>
-                        <a:rPr lang="en-US" dirty="0" err="1"/>
-                        <a:t>Sereda</a:t>
-                      </a:r>
-                      <a:endParaRPr lang="en-US" dirty="0"/>
-                    </a:p>
-                  </a:txBody>
-                  <a:tcPr/>
-                </a:tc>
-                <a:extLst>
-                  <a:ext uri="{0D108BD9-81ED-4DB2-BD59-A6C34878D82A}">
-                    <a16:rowId xmlns:a16="http://schemas.microsoft.com/office/drawing/2014/main" val="1442363784"/>
-                  </a:ext>
-                </a:extLst>
-              </a:tr>
-              <a:tr h="370840">
-                <a:tc>
-                  <a:txBody>
-                    <a:bodyPr/>
-                    <a:lstStyle/>
-                    <a:p>
-                      <a:r>
-                        <a:rPr lang="en-US" dirty="0"/>
-                        <a:t>[15 min]</a:t>
-                      </a:r>
-                    </a:p>
-                  </a:txBody>
-                  <a:tcPr/>
-                </a:tc>
-                <a:tc>
-                  <a:txBody>
-                    <a:bodyPr/>
-                    <a:lstStyle/>
-                    <a:p>
-                      <a:pPr marL="0" marR="0" lvl="0" indent="0" algn="l" defTabSz="914400" rtl="0" eaLnBrk="1" fontAlgn="auto" latinLnBrk="0" hangingPunct="1">
-                        <a:lnSpc>
-                          <a:spcPct val="100000"/>
-                        </a:lnSpc>
-                        <a:spcBef>
-                          <a:spcPts val="0"/>
-                        </a:spcBef>
-                        <a:spcAft>
-                          <a:spcPts val="0"/>
-                        </a:spcAft>
-                        <a:buClrTx/>
-                        <a:buSzTx/>
-                        <a:buFontTx/>
-                        <a:buNone/>
-                        <a:tabLst/>
-                        <a:defRPr/>
-                      </a:pPr>
-                      <a:r>
-                        <a:rPr lang="en-US" b="1" dirty="0"/>
-                        <a:t>Break</a:t>
-                      </a:r>
-                    </a:p>
-                  </a:txBody>
-                  <a:tcPr/>
-                </a:tc>
-                <a:tc>
-                  <a:txBody>
-                    <a:bodyPr/>
-                    <a:lstStyle/>
-                    <a:p>
-                      <a:endParaRPr lang="en-US" dirty="0"/>
-                    </a:p>
-                  </a:txBody>
-                  <a:tcPr/>
-                </a:tc>
-                <a:extLst>
-                  <a:ext uri="{0D108BD9-81ED-4DB2-BD59-A6C34878D82A}">
-                    <a16:rowId xmlns:a16="http://schemas.microsoft.com/office/drawing/2014/main" val="1269228105"/>
-                  </a:ext>
-                </a:extLst>
-              </a:tr>
-              <a:tr h="370840">
-                <a:tc>
-                  <a:txBody>
-                    <a:bodyPr/>
-                    <a:lstStyle/>
-                    <a:p>
-                      <a:r>
-                        <a:rPr lang="en-US" dirty="0"/>
-                        <a:t>[80 min]</a:t>
-                      </a:r>
-                    </a:p>
-                  </a:txBody>
-                  <a:tcPr/>
-                </a:tc>
-                <a:tc>
-                  <a:txBody>
-                    <a:bodyPr/>
-                    <a:lstStyle/>
-                    <a:p>
-                      <a:r>
-                        <a:rPr lang="en-US" sz="1800" kern="1200" dirty="0">
-                          <a:solidFill>
-                            <a:schemeClr val="dk1"/>
-                          </a:solidFill>
-                          <a:effectLst/>
-                          <a:latin typeface="+mn-lt"/>
-                          <a:ea typeface="+mn-ea"/>
-                          <a:cs typeface="+mn-cs"/>
-                        </a:rPr>
-                        <a:t>(4) Guided exercise: </a:t>
-                      </a:r>
-                    </a:p>
-                    <a:p>
-                      <a:pPr marL="285750" indent="-285750">
-                        <a:buFontTx/>
-                        <a:buChar char="-"/>
-                      </a:pPr>
-                      <a:r>
-                        <a:rPr lang="en-US" sz="1800" kern="1200" dirty="0">
-                          <a:solidFill>
-                            <a:schemeClr val="dk1"/>
-                          </a:solidFill>
-                          <a:effectLst/>
-                          <a:latin typeface="+mn-lt"/>
-                          <a:ea typeface="+mn-ea"/>
-                          <a:cs typeface="+mn-cs"/>
-                        </a:rPr>
-                        <a:t>Implement a simple cancer natural history DES for one person</a:t>
-                      </a:r>
-                    </a:p>
-                    <a:p>
-                      <a:pPr marL="285750" indent="-285750">
-                        <a:buFontTx/>
-                        <a:buChar char="-"/>
-                      </a:pPr>
-                      <a:r>
-                        <a:rPr lang="en-US" sz="1800" kern="1200" dirty="0">
-                          <a:solidFill>
-                            <a:schemeClr val="dk1"/>
-                          </a:solidFill>
-                          <a:effectLst/>
-                          <a:latin typeface="+mn-lt"/>
-                          <a:ea typeface="+mn-ea"/>
-                          <a:cs typeface="+mn-cs"/>
-                        </a:rPr>
-                        <a:t>The many-person case</a:t>
-                      </a:r>
-                    </a:p>
-                    <a:p>
-                      <a:pPr marL="285750" indent="-285750">
-                        <a:buFontTx/>
-                        <a:buChar char="-"/>
-                      </a:pPr>
-                      <a:r>
-                        <a:rPr lang="en-US" sz="1800" kern="1200" dirty="0">
-                          <a:solidFill>
-                            <a:schemeClr val="dk1"/>
-                          </a:solidFill>
-                          <a:effectLst/>
-                          <a:latin typeface="+mn-lt"/>
-                          <a:ea typeface="+mn-ea"/>
-                          <a:cs typeface="+mn-cs"/>
-                        </a:rPr>
-                        <a:t>Packaging </a:t>
-                      </a:r>
-                    </a:p>
-                  </a:txBody>
-                  <a:tcPr/>
-                </a:tc>
-                <a:tc>
-                  <a:txBody>
-                    <a:bodyPr/>
-                    <a:lstStyle/>
-                    <a:p>
-                      <a:r>
-                        <a:rPr lang="en-US" dirty="0"/>
-                        <a:t>[All]</a:t>
-                      </a:r>
-                    </a:p>
-                    <a:p>
-                      <a:r>
-                        <a:rPr lang="en-US" dirty="0" err="1"/>
-                        <a:t>Chrysanthopoulou</a:t>
-                      </a:r>
-                      <a:endParaRPr lang="en-US" dirty="0"/>
-                    </a:p>
-                    <a:p>
-                      <a:endParaRPr lang="en-US" dirty="0"/>
-                    </a:p>
-                    <a:p>
-                      <a:r>
-                        <a:rPr lang="en-US" dirty="0" err="1"/>
-                        <a:t>Sereda</a:t>
-                      </a:r>
-                      <a:r>
-                        <a:rPr lang="en-US" dirty="0"/>
-                        <a:t>/</a:t>
-                      </a:r>
-                      <a:r>
-                        <a:rPr lang="en-US" dirty="0" err="1"/>
-                        <a:t>Alarid</a:t>
-                      </a:r>
-                      <a:r>
-                        <a:rPr lang="en-US" dirty="0"/>
-                        <a:t>-Escudero</a:t>
-                      </a:r>
-                    </a:p>
-                    <a:p>
-                      <a:r>
-                        <a:rPr lang="en-US" dirty="0" err="1"/>
-                        <a:t>Trikalinos</a:t>
-                      </a:r>
-                      <a:endParaRPr lang="en-US" dirty="0"/>
-                    </a:p>
-                  </a:txBody>
-                  <a:tcPr/>
-                </a:tc>
-                <a:extLst>
-                  <a:ext uri="{0D108BD9-81ED-4DB2-BD59-A6C34878D82A}">
-                    <a16:rowId xmlns:a16="http://schemas.microsoft.com/office/drawing/2014/main" val="1448491104"/>
-                  </a:ext>
-                </a:extLst>
-              </a:tr>
-              <a:tr h="370840">
-                <a:tc>
-                  <a:txBody>
-                    <a:bodyPr/>
-                    <a:lstStyle/>
-                    <a:p>
-                      <a:r>
-                        <a:rPr lang="en-US" dirty="0"/>
-                        <a:t>[5 min]</a:t>
-                      </a:r>
-                    </a:p>
-                  </a:txBody>
-                  <a:tcPr/>
-                </a:tc>
-                <a:tc>
-                  <a:txBody>
-                    <a:bodyPr/>
-                    <a:lstStyle/>
-                    <a:p>
-                      <a:pPr marL="0" marR="0" lvl="0" indent="0" algn="l" defTabSz="914400" rtl="0" eaLnBrk="1" fontAlgn="auto" latinLnBrk="0" hangingPunct="1">
-                        <a:lnSpc>
-                          <a:spcPct val="100000"/>
-                        </a:lnSpc>
-                        <a:spcBef>
-                          <a:spcPts val="0"/>
-                        </a:spcBef>
-                        <a:spcAft>
-                          <a:spcPts val="0"/>
-                        </a:spcAft>
-                        <a:buClrTx/>
-                        <a:buSzTx/>
-                        <a:buFontTx/>
-                        <a:buNone/>
-                        <a:tabLst/>
-                        <a:defRPr/>
-                      </a:pPr>
-                      <a:r>
-                        <a:rPr lang="en-US" sz="1800" kern="1200" dirty="0">
-                          <a:solidFill>
-                            <a:schemeClr val="dk1"/>
-                          </a:solidFill>
-                          <a:effectLst/>
-                          <a:latin typeface="+mn-lt"/>
-                          <a:ea typeface="+mn-ea"/>
-                          <a:cs typeface="+mn-cs"/>
-                        </a:rPr>
-                        <a:t>(5) Advanced Topic Teaser on self-excitatory processes: point processes that are not NHPPPs and when you may need them</a:t>
-                      </a:r>
-                    </a:p>
-                  </a:txBody>
-                  <a:tcPr/>
-                </a:tc>
-                <a:tc>
-                  <a:txBody>
-                    <a:bodyPr/>
-                    <a:lstStyle/>
-                    <a:p>
-                      <a:r>
-                        <a:rPr lang="en-US" dirty="0" err="1"/>
-                        <a:t>Trikalinos</a:t>
-                      </a:r>
-                      <a:endParaRPr lang="en-US" dirty="0"/>
-                    </a:p>
-                  </a:txBody>
-                  <a:tcPr/>
-                </a:tc>
-                <a:extLst>
-                  <a:ext uri="{0D108BD9-81ED-4DB2-BD59-A6C34878D82A}">
-                    <a16:rowId xmlns:a16="http://schemas.microsoft.com/office/drawing/2014/main" val="3766472740"/>
-                  </a:ext>
-                </a:extLst>
-              </a:tr>
-              <a:tr h="370840">
-                <a:tc>
-                  <a:txBody>
-                    <a:bodyPr/>
-                    <a:lstStyle/>
-                    <a:p>
-                      <a:r>
-                        <a:rPr lang="en-US" dirty="0"/>
-                        <a:t>[15 min]</a:t>
-                      </a:r>
-                    </a:p>
-                  </a:txBody>
-                  <a:tcPr/>
-                </a:tc>
-                <a:tc>
-                  <a:txBody>
-                    <a:bodyPr/>
-                    <a:lstStyle/>
-                    <a:p>
-                      <a:r>
-                        <a:rPr lang="en-US" dirty="0"/>
-                        <a:t>General Q &amp; A</a:t>
-                      </a:r>
-                    </a:p>
-                  </a:txBody>
-                  <a:tcPr/>
-                </a:tc>
-                <a:tc>
-                  <a:txBody>
-                    <a:bodyPr/>
-                    <a:lstStyle/>
-                    <a:p>
-                      <a:r>
-                        <a:rPr lang="en-US" dirty="0"/>
-                        <a:t>All</a:t>
-                      </a:r>
-                    </a:p>
-                  </a:txBody>
-                  <a:tcPr/>
-                </a:tc>
-                <a:extLst>
-                  <a:ext uri="{0D108BD9-81ED-4DB2-BD59-A6C34878D82A}">
-                    <a16:rowId xmlns:a16="http://schemas.microsoft.com/office/drawing/2014/main" val="3034331301"/>
-                  </a:ext>
-                </a:extLst>
-              </a:tr>
-            </a:tbl>
-          </a:graphicData>
-        </a:graphic>
-      </p:graphicFrame>
+              </p:cNvPr>
+              <p:cNvGraphicFramePr>
+                <a:graphicFrameLocks noGrp="1"/>
+              </p:cNvGraphicFramePr>
+              <p:nvPr>
+                <p:ph idx="1"/>
+                <p:extLst>
+                  <p:ext uri="{D42A27DB-BD31-4B8C-83A1-F6EECF244321}">
+                    <p14:modId xmlns:p14="http://schemas.microsoft.com/office/powerpoint/2010/main" val="1673659455"/>
+                  </p:ext>
+                </p:extLst>
+              </p:nvPr>
+            </p:nvGraphicFramePr>
+            <p:xfrm>
+              <a:off x="1208690" y="942340"/>
+              <a:ext cx="10720551" cy="4699000"/>
+            </p:xfrm>
+            <a:graphic>
+              <a:graphicData uri="http://schemas.openxmlformats.org/drawingml/2006/table">
+                <a:tbl>
+                  <a:tblPr firstRow="1" bandRow="1">
+                    <a:tableStyleId>{21E4AEA4-8DFA-4A89-87EB-49C32662AFE0}</a:tableStyleId>
+                  </a:tblPr>
+                  <a:tblGrid>
+                    <a:gridCol w="1717110">
+                      <a:extLst>
+                        <a:ext uri="{9D8B030D-6E8A-4147-A177-3AD203B41FA5}">
+                          <a16:colId xmlns:a16="http://schemas.microsoft.com/office/drawing/2014/main" val="4182014441"/>
+                        </a:ext>
+                      </a:extLst>
+                    </a:gridCol>
+                    <a:gridCol w="5976462">
+                      <a:extLst>
+                        <a:ext uri="{9D8B030D-6E8A-4147-A177-3AD203B41FA5}">
+                          <a16:colId xmlns:a16="http://schemas.microsoft.com/office/drawing/2014/main" val="906180283"/>
+                        </a:ext>
+                      </a:extLst>
+                    </a:gridCol>
+                    <a:gridCol w="3026979">
+                      <a:extLst>
+                        <a:ext uri="{9D8B030D-6E8A-4147-A177-3AD203B41FA5}">
+                          <a16:colId xmlns:a16="http://schemas.microsoft.com/office/drawing/2014/main" val="2769721792"/>
+                        </a:ext>
+                      </a:extLst>
+                    </a:gridCol>
+                  </a:tblGrid>
+                  <a:tr h="370840">
+                    <a:tc>
+                      <a:txBody>
+                        <a:bodyPr/>
+                        <a:lstStyle/>
+                        <a:p>
+                          <a:r>
+                            <a:rPr lang="en-US" dirty="0"/>
+                            <a:t>Time</a:t>
+                          </a:r>
+                        </a:p>
+                      </a:txBody>
+                      <a:tcPr/>
+                    </a:tc>
+                    <a:tc>
+                      <a:txBody>
+                        <a:bodyPr/>
+                        <a:lstStyle/>
+                        <a:p>
+                          <a:r>
+                            <a:rPr lang="en-US" dirty="0"/>
+                            <a:t>Description</a:t>
+                          </a:r>
+                        </a:p>
+                      </a:txBody>
+                      <a:tcPr/>
+                    </a:tc>
+                    <a:tc>
+                      <a:txBody>
+                        <a:bodyPr/>
+                        <a:lstStyle/>
+                        <a:p>
+                          <a:r>
+                            <a:rPr lang="en-US" dirty="0"/>
+                            <a:t>Discussant</a:t>
+                          </a:r>
+                        </a:p>
+                      </a:txBody>
+                      <a:tcPr/>
+                    </a:tc>
+                    <a:extLst>
+                      <a:ext uri="{0D108BD9-81ED-4DB2-BD59-A6C34878D82A}">
+                        <a16:rowId xmlns:a16="http://schemas.microsoft.com/office/drawing/2014/main" val="1700444250"/>
+                      </a:ext>
+                    </a:extLst>
+                  </a:tr>
+                  <a:tr h="370840">
+                    <a:tc>
+                      <a:txBody>
+                        <a:bodyPr/>
+                        <a:lstStyle/>
+                        <a:p>
+                          <a:r>
+                            <a:rPr lang="en-US" dirty="0"/>
+                            <a:t>[15 min]</a:t>
+                          </a:r>
+                        </a:p>
+                      </a:txBody>
+                      <a:tcPr/>
+                    </a:tc>
+                    <a:tc>
+                      <a:txBody>
+                        <a:bodyPr/>
+                        <a:lstStyle/>
+                        <a:p>
+                          <a:r>
+                            <a:rPr lang="en-US" sz="1800" kern="1200" dirty="0">
+                              <a:solidFill>
+                                <a:schemeClr val="dk1"/>
+                              </a:solidFill>
+                              <a:effectLst/>
+                              <a:latin typeface="+mn-lt"/>
+                              <a:ea typeface="+mn-ea"/>
+                              <a:cs typeface="+mn-cs"/>
+                            </a:rPr>
+                            <a:t>(0) Introductions and administrivia </a:t>
+                          </a:r>
+                          <a:endParaRPr lang="en-US" dirty="0"/>
+                        </a:p>
+                      </a:txBody>
+                      <a:tcPr/>
+                    </a:tc>
+                    <a:tc>
+                      <a:txBody>
+                        <a:bodyPr/>
+                        <a:lstStyle/>
+                        <a:p>
+                          <a:r>
+                            <a:rPr lang="en-US" dirty="0" err="1"/>
+                            <a:t>Trikalinos</a:t>
+                          </a:r>
+                          <a:endParaRPr lang="en-US" dirty="0"/>
+                        </a:p>
+                      </a:txBody>
+                      <a:tcPr/>
+                    </a:tc>
+                    <a:extLst>
+                      <a:ext uri="{0D108BD9-81ED-4DB2-BD59-A6C34878D82A}">
+                        <a16:rowId xmlns:a16="http://schemas.microsoft.com/office/drawing/2014/main" val="2490995723"/>
+                      </a:ext>
+                    </a:extLst>
+                  </a:tr>
+                  <a:tr h="370840">
+                    <a:tc>
+                      <a:txBody>
+                        <a:bodyPr/>
+                        <a:lstStyle/>
+                        <a:p>
+                          <a:r>
+                            <a:rPr lang="en-US" dirty="0"/>
+                            <a:t>[25 min]</a:t>
+                          </a:r>
+                        </a:p>
+                      </a:txBody>
+                      <a:tcPr/>
+                    </a:tc>
+                    <a:tc>
+                      <a:txBody>
+                        <a:bodyPr/>
+                        <a:lstStyle/>
+                        <a:p>
+                          <a:r>
+                            <a:rPr lang="en-US" sz="1800" kern="1200" dirty="0">
+                              <a:solidFill>
+                                <a:schemeClr val="dk1"/>
+                              </a:solidFill>
+                              <a:effectLst/>
+                              <a:latin typeface="+mn-lt"/>
+                              <a:ea typeface="+mn-ea"/>
+                              <a:cs typeface="+mn-cs"/>
+                            </a:rPr>
+                            <a:t>(1) DES as a composition of point processes</a:t>
+                          </a:r>
+                        </a:p>
+                      </a:txBody>
+                      <a:tcPr/>
+                    </a:tc>
+                    <a:tc>
+                      <a:txBody>
+                        <a:bodyPr/>
+                        <a:lstStyle/>
+                        <a:p>
+                          <a:r>
+                            <a:rPr lang="en-US" dirty="0" err="1"/>
+                            <a:t>Alarid</a:t>
+                          </a:r>
+                          <a:r>
+                            <a:rPr lang="en-US" dirty="0"/>
+                            <a:t>-Escudero</a:t>
+                          </a:r>
+                        </a:p>
+                      </a:txBody>
+                      <a:tcPr/>
+                    </a:tc>
+                    <a:extLst>
+                      <a:ext uri="{0D108BD9-81ED-4DB2-BD59-A6C34878D82A}">
+                        <a16:rowId xmlns:a16="http://schemas.microsoft.com/office/drawing/2014/main" val="2065491183"/>
+                      </a:ext>
+                    </a:extLst>
+                  </a:tr>
+                  <a:tr h="370840">
+                    <a:tc>
+                      <a:txBody>
+                        <a:bodyPr/>
+                        <a:lstStyle/>
+                        <a:p>
+                          <a:r>
+                            <a:rPr lang="en-US" dirty="0"/>
+                            <a:t>[30 min]</a:t>
+                          </a:r>
+                        </a:p>
+                      </a:txBody>
+                      <a:tcPr/>
+                    </a:tc>
+                    <a:tc>
+                      <a:txBody>
+                        <a:bodyPr/>
+                        <a:lstStyle/>
+                        <a:p>
+                          <a:pPr marL="0" marR="0" lvl="0" indent="0" algn="l" defTabSz="914400" rtl="0" eaLnBrk="1" fontAlgn="auto" latinLnBrk="0" hangingPunct="1">
+                            <a:lnSpc>
+                              <a:spcPct val="100000"/>
+                            </a:lnSpc>
+                            <a:spcBef>
+                              <a:spcPts val="0"/>
+                            </a:spcBef>
+                            <a:spcAft>
+                              <a:spcPts val="0"/>
+                            </a:spcAft>
+                            <a:buClrTx/>
+                            <a:buSzTx/>
+                            <a:buFontTx/>
+                            <a:buNone/>
+                            <a:tabLst/>
+                            <a:defRPr/>
+                          </a:pPr>
+                          <a:r>
+                            <a:rPr lang="en-US" sz="1800" kern="1200" dirty="0">
+                              <a:solidFill>
+                                <a:schemeClr val="dk1"/>
+                              </a:solidFill>
+                              <a:effectLst/>
+                              <a:latin typeface="+mn-lt"/>
+                              <a:ea typeface="+mn-ea"/>
+                              <a:cs typeface="+mn-cs"/>
+                            </a:rPr>
+                            <a:t>(2) NHPPPs – key properties</a:t>
+                          </a:r>
+                        </a:p>
+                      </a:txBody>
+                      <a:tcPr/>
+                    </a:tc>
+                    <a:tc>
+                      <a:txBody>
+                        <a:bodyPr/>
+                        <a:lstStyle/>
+                        <a:p>
+                          <a:r>
+                            <a:rPr lang="en-US" dirty="0" err="1"/>
+                            <a:t>Trikalinos</a:t>
+                          </a:r>
+                          <a:endParaRPr lang="en-US" dirty="0"/>
+                        </a:p>
+                      </a:txBody>
+                      <a:tcPr/>
+                    </a:tc>
+                    <a:extLst>
+                      <a:ext uri="{0D108BD9-81ED-4DB2-BD59-A6C34878D82A}">
+                        <a16:rowId xmlns:a16="http://schemas.microsoft.com/office/drawing/2014/main" val="2757944147"/>
+                      </a:ext>
+                    </a:extLst>
+                  </a:tr>
+                  <a:tr h="370840">
+                    <a:tc>
+                      <a:txBody>
+                        <a:bodyPr/>
+                        <a:lstStyle/>
+                        <a:p>
+                          <a:r>
+                            <a:rPr lang="en-US" dirty="0"/>
+                            <a:t>[30 min]</a:t>
+                          </a:r>
+                        </a:p>
+                      </a:txBody>
+                      <a:tcPr/>
+                    </a:tc>
+                    <a:tc>
+                      <a:txBody>
+                        <a:bodyPr/>
+                        <a:lstStyle/>
+                        <a:p>
+                          <a:r>
+                            <a:rPr lang="en-US" sz="1800" kern="1200" dirty="0">
+                              <a:solidFill>
+                                <a:schemeClr val="dk1"/>
+                              </a:solidFill>
+                              <a:effectLst/>
+                              <a:latin typeface="+mn-lt"/>
+                              <a:ea typeface="+mn-ea"/>
+                              <a:cs typeface="+mn-cs"/>
+                            </a:rPr>
+                            <a:t>(3) Sampling from NHPPPs</a:t>
+                          </a:r>
+                          <a:endParaRPr lang="en-US" dirty="0"/>
+                        </a:p>
+                      </a:txBody>
+                      <a:tcPr/>
+                    </a:tc>
+                    <a:tc>
+                      <a:txBody>
+                        <a:bodyPr/>
+                        <a:lstStyle/>
+                        <a:p>
+                          <a:pPr marL="0" marR="0" lvl="0" indent="0" algn="l" defTabSz="914400" rtl="0" eaLnBrk="1" fontAlgn="auto" latinLnBrk="0" hangingPunct="1">
+                            <a:lnSpc>
+                              <a:spcPct val="100000"/>
+                            </a:lnSpc>
+                            <a:spcBef>
+                              <a:spcPts val="0"/>
+                            </a:spcBef>
+                            <a:spcAft>
+                              <a:spcPts val="0"/>
+                            </a:spcAft>
+                            <a:buClrTx/>
+                            <a:buSzTx/>
+                            <a:buFontTx/>
+                            <a:buNone/>
+                            <a:tabLst/>
+                            <a:defRPr/>
+                          </a:pPr>
+                          <a:r>
+                            <a:rPr lang="en-US" dirty="0"/>
+                            <a:t>Trikalinos</a:t>
+                          </a:r>
+                        </a:p>
+                      </a:txBody>
+                      <a:tcPr/>
+                    </a:tc>
+                    <a:extLst>
+                      <a:ext uri="{0D108BD9-81ED-4DB2-BD59-A6C34878D82A}">
+                        <a16:rowId xmlns:a16="http://schemas.microsoft.com/office/drawing/2014/main" val="1442363784"/>
+                      </a:ext>
+                    </a:extLst>
+                  </a:tr>
+                  <a:tr h="370840">
+                    <a:tc>
+                      <a:txBody>
+                        <a:bodyPr/>
+                        <a:lstStyle/>
+                        <a:p>
+                          <a:r>
+                            <a:rPr lang="en-US" dirty="0"/>
+                            <a:t>[15 min]</a:t>
+                          </a:r>
+                        </a:p>
+                      </a:txBody>
+                      <a:tcPr/>
+                    </a:tc>
+                    <a:tc>
+                      <a:txBody>
+                        <a:bodyPr/>
+                        <a:lstStyle/>
+                        <a:p>
+                          <a:pPr marL="0" marR="0" lvl="0" indent="0" algn="l" defTabSz="914400" rtl="0" eaLnBrk="1" fontAlgn="auto" latinLnBrk="0" hangingPunct="1">
+                            <a:lnSpc>
+                              <a:spcPct val="100000"/>
+                            </a:lnSpc>
+                            <a:spcBef>
+                              <a:spcPts val="0"/>
+                            </a:spcBef>
+                            <a:spcAft>
+                              <a:spcPts val="0"/>
+                            </a:spcAft>
+                            <a:buClrTx/>
+                            <a:buSzTx/>
+                            <a:buFontTx/>
+                            <a:buNone/>
+                            <a:tabLst/>
+                            <a:defRPr/>
+                          </a:pPr>
+                          <a:r>
+                            <a:rPr lang="en-US" b="1" dirty="0"/>
+                            <a:t>Break</a:t>
+                          </a:r>
+                        </a:p>
+                      </a:txBody>
+                      <a:tcPr/>
+                    </a:tc>
+                    <a:tc>
+                      <a:txBody>
+                        <a:bodyPr/>
+                        <a:lstStyle/>
+                        <a:p>
+                          <a:endParaRPr lang="en-US" dirty="0"/>
+                        </a:p>
+                      </a:txBody>
+                      <a:tcPr/>
+                    </a:tc>
+                    <a:extLst>
+                      <a:ext uri="{0D108BD9-81ED-4DB2-BD59-A6C34878D82A}">
+                        <a16:rowId xmlns:a16="http://schemas.microsoft.com/office/drawing/2014/main" val="1269228105"/>
+                      </a:ext>
+                    </a:extLst>
+                  </a:tr>
+                  <a:tr h="1188720">
+                    <a:tc>
+                      <a:txBody>
+                        <a:bodyPr/>
+                        <a:lstStyle/>
+                        <a:p>
+                          <a:r>
+                            <a:rPr lang="en-US" dirty="0"/>
+                            <a:t>[80 min]</a:t>
+                          </a:r>
+                        </a:p>
+                      </a:txBody>
+                      <a:tcPr/>
+                    </a:tc>
+                    <a:tc>
+                      <a:txBody>
+                        <a:bodyPr/>
+                        <a:lstStyle/>
+                        <a:p>
+                          <a:endParaRPr lang="en-US"/>
+                        </a:p>
+                      </a:txBody>
+                      <a:tcPr>
+                        <a:blipFill>
+                          <a:blip r:embed="rId2"/>
+                          <a:stretch>
+                            <a:fillRect l="-28875" t="-189362" r="-51168" b="-114894"/>
+                          </a:stretch>
+                        </a:blipFill>
+                      </a:tcPr>
+                    </a:tc>
+                    <a:tc>
+                      <a:txBody>
+                        <a:bodyPr/>
+                        <a:lstStyle/>
+                        <a:p>
+                          <a:r>
+                            <a:rPr lang="en-US" dirty="0"/>
+                            <a:t>[All]</a:t>
+                          </a:r>
+                        </a:p>
+                        <a:p>
+                          <a:r>
+                            <a:rPr lang="en-US" dirty="0"/>
+                            <a:t>Trikalinos</a:t>
+                          </a:r>
+                        </a:p>
+                        <a:p>
+                          <a:r>
+                            <a:rPr lang="en-US" dirty="0"/>
+                            <a:t>Sereda</a:t>
+                          </a:r>
+                        </a:p>
+                        <a:p>
+                          <a:pPr marL="0" marR="0" lvl="0" indent="0" algn="l" defTabSz="914400" rtl="0" eaLnBrk="1" fontAlgn="auto" latinLnBrk="0" hangingPunct="1">
+                            <a:lnSpc>
+                              <a:spcPct val="100000"/>
+                            </a:lnSpc>
+                            <a:spcBef>
+                              <a:spcPts val="0"/>
+                            </a:spcBef>
+                            <a:spcAft>
+                              <a:spcPts val="0"/>
+                            </a:spcAft>
+                            <a:buClrTx/>
+                            <a:buSzTx/>
+                            <a:buFontTx/>
+                            <a:buNone/>
+                            <a:tabLst/>
+                            <a:defRPr/>
+                          </a:pPr>
+                          <a:r>
+                            <a:rPr lang="en-US" dirty="0"/>
+                            <a:t>Sereda</a:t>
+                          </a:r>
+                        </a:p>
+                      </a:txBody>
+                      <a:tcPr/>
+                    </a:tc>
+                    <a:extLst>
+                      <a:ext uri="{0D108BD9-81ED-4DB2-BD59-A6C34878D82A}">
+                        <a16:rowId xmlns:a16="http://schemas.microsoft.com/office/drawing/2014/main" val="1448491104"/>
+                      </a:ext>
+                    </a:extLst>
+                  </a:tr>
+                  <a:tr h="914400">
+                    <a:tc>
+                      <a:txBody>
+                        <a:bodyPr/>
+                        <a:lstStyle/>
+                        <a:p>
+                          <a:r>
+                            <a:rPr lang="en-US" dirty="0"/>
+                            <a:t>[5 min]</a:t>
+                          </a:r>
+                        </a:p>
+                      </a:txBody>
+                      <a:tcPr/>
+                    </a:tc>
+                    <a:tc>
+                      <a:txBody>
+                        <a:bodyPr/>
+                        <a:lstStyle/>
+                        <a:p>
+                          <a:pPr marL="0" marR="0" lvl="0" indent="0" algn="l" defTabSz="914400" rtl="0" eaLnBrk="1" fontAlgn="auto" latinLnBrk="0" hangingPunct="1">
+                            <a:lnSpc>
+                              <a:spcPct val="100000"/>
+                            </a:lnSpc>
+                            <a:spcBef>
+                              <a:spcPts val="0"/>
+                            </a:spcBef>
+                            <a:spcAft>
+                              <a:spcPts val="0"/>
+                            </a:spcAft>
+                            <a:buClrTx/>
+                            <a:buSzTx/>
+                            <a:buFontTx/>
+                            <a:buNone/>
+                            <a:tabLst/>
+                            <a:defRPr/>
+                          </a:pPr>
+                          <a:r>
+                            <a:rPr lang="en-US" sz="1800" kern="1200" dirty="0">
+                              <a:solidFill>
+                                <a:schemeClr val="dk1"/>
+                              </a:solidFill>
+                              <a:effectLst/>
+                              <a:latin typeface="+mn-lt"/>
+                              <a:ea typeface="+mn-ea"/>
+                              <a:cs typeface="+mn-cs"/>
+                            </a:rPr>
+                            <a:t>(5) Advanced Topic Teaser on self-excitatory processes: point processes that are not NHPPPs and when you may need them</a:t>
+                          </a:r>
+                        </a:p>
+                      </a:txBody>
+                      <a:tcPr/>
+                    </a:tc>
+                    <a:tc>
+                      <a:txBody>
+                        <a:bodyPr/>
+                        <a:lstStyle/>
+                        <a:p>
+                          <a:r>
+                            <a:rPr lang="en-US" dirty="0"/>
+                            <a:t>Trikalinos</a:t>
+                          </a:r>
+                        </a:p>
+                      </a:txBody>
+                      <a:tcPr/>
+                    </a:tc>
+                    <a:extLst>
+                      <a:ext uri="{0D108BD9-81ED-4DB2-BD59-A6C34878D82A}">
+                        <a16:rowId xmlns:a16="http://schemas.microsoft.com/office/drawing/2014/main" val="3766472740"/>
+                      </a:ext>
+                    </a:extLst>
+                  </a:tr>
+                  <a:tr h="370840">
+                    <a:tc>
+                      <a:txBody>
+                        <a:bodyPr/>
+                        <a:lstStyle/>
+                        <a:p>
+                          <a:r>
+                            <a:rPr lang="en-US" dirty="0"/>
+                            <a:t>[15 min]</a:t>
+                          </a:r>
+                        </a:p>
+                      </a:txBody>
+                      <a:tcPr/>
+                    </a:tc>
+                    <a:tc>
+                      <a:txBody>
+                        <a:bodyPr/>
+                        <a:lstStyle/>
+                        <a:p>
+                          <a:r>
+                            <a:rPr lang="en-US" dirty="0"/>
+                            <a:t>General Q &amp; A</a:t>
+                          </a:r>
+                        </a:p>
+                      </a:txBody>
+                      <a:tcPr/>
+                    </a:tc>
+                    <a:tc>
+                      <a:txBody>
+                        <a:bodyPr/>
+                        <a:lstStyle/>
+                        <a:p>
+                          <a:r>
+                            <a:rPr lang="en-US" dirty="0"/>
+                            <a:t>All</a:t>
+                          </a:r>
+                        </a:p>
+                      </a:txBody>
+                      <a:tcPr/>
+                    </a:tc>
+                    <a:extLst>
+                      <a:ext uri="{0D108BD9-81ED-4DB2-BD59-A6C34878D82A}">
+                        <a16:rowId xmlns:a16="http://schemas.microsoft.com/office/drawing/2014/main" val="3034331301"/>
+                      </a:ext>
+                    </a:extLst>
+                  </a:tr>
+                </a:tbl>
+              </a:graphicData>
+            </a:graphic>
+          </p:graphicFrame>
+        </mc:Fallback>
+      </mc:AlternateContent>
       <p:sp>
         <p:nvSpPr>
           <p:cNvPr id="5" name="Right Arrow 4">
@@ -4348,7 +5108,7 @@
           <a:p>
             <a:r>
               <a:rPr lang="en-US" sz="2400" dirty="0"/>
-              <a:t>Sunday 15</a:t>
+              <a:t>Sunday 28</a:t>
             </a:r>
             <a:r>
               <a:rPr lang="en-US" sz="2400" baseline="30000" dirty="0"/>
